--- a/server_monitoring_project_presentation.pptx
+++ b/server_monitoring_project_presentation.pptx
@@ -3358,17 +3358,31 @@
           <a:p>
             <a:r>
               <a:rPr dirty="0"/>
-              <a:t>GitHub Repository: (</a:t>
+              <a:t>GitHub Repository: </a:t>
+            </a:r>
+            <a:endParaRPr lang="en-US" dirty="0"/>
+          </a:p>
+          <a:p>
+            <a:pPr marL="0" indent="0">
+              <a:buNone/>
+            </a:pPr>
+            <a:r>
+              <a:rPr dirty="0"/>
+              <a:t>(</a:t>
+            </a:r>
+            <a:r>
+              <a:rPr lang="en-US" dirty="0"/>
+              <a:t> </a:t>
             </a:r>
             <a:r>
               <a:rPr lang="en-US" dirty="0">
                 <a:hlinkClick r:id="rId3"/>
               </a:rPr>
-              <a:t>https://github.com/Praveengadwala06/server-monitoring-pipeline</a:t>
+              <a:t>https://github.com/Praveengadwala06/neo </a:t>
             </a:r>
             <a:r>
               <a:rPr lang="en-US" dirty="0"/>
-              <a:t> )</a:t>
+              <a:t>)</a:t>
             </a:r>
             <a:endParaRPr dirty="0"/>
           </a:p>
